--- a/我們獻上.pptx
+++ b/我們獻上.pptx
@@ -178,10 +178,9 @@
           <a:lstStyle/>
           <a:p>
             <a:r>
-              <a:rPr lang="zh-TW" altLang="en-US" smtClean="0"/>
+              <a:rPr lang="zh-TW" altLang="en-US"/>
               <a:t>按一下以編輯母片標題樣式</a:t>
             </a:r>
-            <a:endParaRPr lang="zh-TW" altLang="en-US"/>
           </a:p>
         </p:txBody>
       </p:sp>
@@ -297,10 +296,9 @@
           </a:lstStyle>
           <a:p>
             <a:r>
-              <a:rPr lang="zh-TW" altLang="en-US" smtClean="0"/>
+              <a:rPr lang="zh-TW" altLang="en-US"/>
               <a:t>按一下以編輯母片副標題樣式</a:t>
             </a:r>
-            <a:endParaRPr lang="zh-TW" altLang="en-US"/>
           </a:p>
         </p:txBody>
       </p:sp>
@@ -321,7 +319,7 @@
           <a:p>
             <a:fld id="{F64B101B-5B87-4A49-B942-DEC712B6B7B9}" type="datetimeFigureOut">
               <a:rPr lang="zh-TW" altLang="en-US" smtClean="0"/>
-              <a:t>2023/11/18</a:t>
+              <a:t>2024/5/25</a:t>
             </a:fld>
             <a:endParaRPr lang="zh-TW" altLang="en-US"/>
           </a:p>
@@ -410,10 +408,9 @@
           <a:lstStyle/>
           <a:p>
             <a:r>
-              <a:rPr lang="zh-TW" altLang="en-US" smtClean="0"/>
+              <a:rPr lang="zh-TW" altLang="en-US"/>
               <a:t>按一下以編輯母片標題樣式</a:t>
             </a:r>
-            <a:endParaRPr lang="zh-TW" altLang="en-US"/>
           </a:p>
         </p:txBody>
       </p:sp>
@@ -434,38 +431,37 @@
           <a:p>
             <a:pPr lvl="0"/>
             <a:r>
-              <a:rPr lang="zh-TW" altLang="en-US" smtClean="0"/>
+              <a:rPr lang="zh-TW" altLang="en-US"/>
               <a:t>按一下以編輯母片文字樣式</a:t>
             </a:r>
           </a:p>
           <a:p>
             <a:pPr lvl="1"/>
             <a:r>
-              <a:rPr lang="zh-TW" altLang="en-US" smtClean="0"/>
+              <a:rPr lang="zh-TW" altLang="en-US"/>
               <a:t>第二層</a:t>
             </a:r>
           </a:p>
           <a:p>
             <a:pPr lvl="2"/>
             <a:r>
-              <a:rPr lang="zh-TW" altLang="en-US" smtClean="0"/>
+              <a:rPr lang="zh-TW" altLang="en-US"/>
               <a:t>第三層</a:t>
             </a:r>
           </a:p>
           <a:p>
             <a:pPr lvl="3"/>
             <a:r>
-              <a:rPr lang="zh-TW" altLang="en-US" smtClean="0"/>
+              <a:rPr lang="zh-TW" altLang="en-US"/>
               <a:t>第四層</a:t>
             </a:r>
           </a:p>
           <a:p>
             <a:pPr lvl="4"/>
             <a:r>
-              <a:rPr lang="zh-TW" altLang="en-US" smtClean="0"/>
+              <a:rPr lang="zh-TW" altLang="en-US"/>
               <a:t>第五層</a:t>
             </a:r>
-            <a:endParaRPr lang="zh-TW" altLang="en-US"/>
           </a:p>
         </p:txBody>
       </p:sp>
@@ -486,7 +482,7 @@
           <a:p>
             <a:fld id="{F64B101B-5B87-4A49-B942-DEC712B6B7B9}" type="datetimeFigureOut">
               <a:rPr lang="zh-TW" altLang="en-US" smtClean="0"/>
-              <a:t>2023/11/18</a:t>
+              <a:t>2024/5/25</a:t>
             </a:fld>
             <a:endParaRPr lang="zh-TW" altLang="en-US"/>
           </a:p>
@@ -580,10 +576,9 @@
           <a:lstStyle/>
           <a:p>
             <a:r>
-              <a:rPr lang="zh-TW" altLang="en-US" smtClean="0"/>
+              <a:rPr lang="zh-TW" altLang="en-US"/>
               <a:t>按一下以編輯母片標題樣式</a:t>
             </a:r>
-            <a:endParaRPr lang="zh-TW" altLang="en-US"/>
           </a:p>
         </p:txBody>
       </p:sp>
@@ -609,38 +604,37 @@
           <a:p>
             <a:pPr lvl="0"/>
             <a:r>
-              <a:rPr lang="zh-TW" altLang="en-US" smtClean="0"/>
+              <a:rPr lang="zh-TW" altLang="en-US"/>
               <a:t>按一下以編輯母片文字樣式</a:t>
             </a:r>
           </a:p>
           <a:p>
             <a:pPr lvl="1"/>
             <a:r>
-              <a:rPr lang="zh-TW" altLang="en-US" smtClean="0"/>
+              <a:rPr lang="zh-TW" altLang="en-US"/>
               <a:t>第二層</a:t>
             </a:r>
           </a:p>
           <a:p>
             <a:pPr lvl="2"/>
             <a:r>
-              <a:rPr lang="zh-TW" altLang="en-US" smtClean="0"/>
+              <a:rPr lang="zh-TW" altLang="en-US"/>
               <a:t>第三層</a:t>
             </a:r>
           </a:p>
           <a:p>
             <a:pPr lvl="3"/>
             <a:r>
-              <a:rPr lang="zh-TW" altLang="en-US" smtClean="0"/>
+              <a:rPr lang="zh-TW" altLang="en-US"/>
               <a:t>第四層</a:t>
             </a:r>
           </a:p>
           <a:p>
             <a:pPr lvl="4"/>
             <a:r>
-              <a:rPr lang="zh-TW" altLang="en-US" smtClean="0"/>
+              <a:rPr lang="zh-TW" altLang="en-US"/>
               <a:t>第五層</a:t>
             </a:r>
-            <a:endParaRPr lang="zh-TW" altLang="en-US"/>
           </a:p>
         </p:txBody>
       </p:sp>
@@ -661,7 +655,7 @@
           <a:p>
             <a:fld id="{F64B101B-5B87-4A49-B942-DEC712B6B7B9}" type="datetimeFigureOut">
               <a:rPr lang="zh-TW" altLang="en-US" smtClean="0"/>
-              <a:t>2023/11/18</a:t>
+              <a:t>2024/5/25</a:t>
             </a:fld>
             <a:endParaRPr lang="zh-TW" altLang="en-US"/>
           </a:p>
@@ -750,10 +744,9 @@
           <a:lstStyle/>
           <a:p>
             <a:r>
-              <a:rPr lang="zh-TW" altLang="en-US" smtClean="0"/>
+              <a:rPr lang="zh-TW" altLang="en-US"/>
               <a:t>按一下以編輯母片標題樣式</a:t>
             </a:r>
-            <a:endParaRPr lang="zh-TW" altLang="en-US"/>
           </a:p>
         </p:txBody>
       </p:sp>
@@ -774,38 +767,37 @@
           <a:p>
             <a:pPr lvl="0"/>
             <a:r>
-              <a:rPr lang="zh-TW" altLang="en-US" smtClean="0"/>
+              <a:rPr lang="zh-TW" altLang="en-US"/>
               <a:t>按一下以編輯母片文字樣式</a:t>
             </a:r>
           </a:p>
           <a:p>
             <a:pPr lvl="1"/>
             <a:r>
-              <a:rPr lang="zh-TW" altLang="en-US" smtClean="0"/>
+              <a:rPr lang="zh-TW" altLang="en-US"/>
               <a:t>第二層</a:t>
             </a:r>
           </a:p>
           <a:p>
             <a:pPr lvl="2"/>
             <a:r>
-              <a:rPr lang="zh-TW" altLang="en-US" smtClean="0"/>
+              <a:rPr lang="zh-TW" altLang="en-US"/>
               <a:t>第三層</a:t>
             </a:r>
           </a:p>
           <a:p>
             <a:pPr lvl="3"/>
             <a:r>
-              <a:rPr lang="zh-TW" altLang="en-US" smtClean="0"/>
+              <a:rPr lang="zh-TW" altLang="en-US"/>
               <a:t>第四層</a:t>
             </a:r>
           </a:p>
           <a:p>
             <a:pPr lvl="4"/>
             <a:r>
-              <a:rPr lang="zh-TW" altLang="en-US" smtClean="0"/>
+              <a:rPr lang="zh-TW" altLang="en-US"/>
               <a:t>第五層</a:t>
             </a:r>
-            <a:endParaRPr lang="zh-TW" altLang="en-US"/>
           </a:p>
         </p:txBody>
       </p:sp>
@@ -826,7 +818,7 @@
           <a:p>
             <a:fld id="{F64B101B-5B87-4A49-B942-DEC712B6B7B9}" type="datetimeFigureOut">
               <a:rPr lang="zh-TW" altLang="en-US" smtClean="0"/>
-              <a:t>2023/11/18</a:t>
+              <a:t>2024/5/25</a:t>
             </a:fld>
             <a:endParaRPr lang="zh-TW" altLang="en-US"/>
           </a:p>
@@ -924,10 +916,9 @@
           </a:lstStyle>
           <a:p>
             <a:r>
-              <a:rPr lang="zh-TW" altLang="en-US" smtClean="0"/>
+              <a:rPr lang="zh-TW" altLang="en-US"/>
               <a:t>按一下以編輯母片標題樣式</a:t>
             </a:r>
-            <a:endParaRPr lang="zh-TW" altLang="en-US"/>
           </a:p>
         </p:txBody>
       </p:sp>
@@ -1044,7 +1035,7 @@
           <a:p>
             <a:pPr lvl="0"/>
             <a:r>
-              <a:rPr lang="zh-TW" altLang="en-US" smtClean="0"/>
+              <a:rPr lang="zh-TW" altLang="en-US"/>
               <a:t>按一下以編輯母片文字樣式</a:t>
             </a:r>
           </a:p>
@@ -1067,7 +1058,7 @@
           <a:p>
             <a:fld id="{F64B101B-5B87-4A49-B942-DEC712B6B7B9}" type="datetimeFigureOut">
               <a:rPr lang="zh-TW" altLang="en-US" smtClean="0"/>
-              <a:t>2023/11/18</a:t>
+              <a:t>2024/5/25</a:t>
             </a:fld>
             <a:endParaRPr lang="zh-TW" altLang="en-US"/>
           </a:p>
@@ -1156,10 +1147,9 @@
           <a:lstStyle/>
           <a:p>
             <a:r>
-              <a:rPr lang="zh-TW" altLang="en-US" smtClean="0"/>
+              <a:rPr lang="zh-TW" altLang="en-US"/>
               <a:t>按一下以編輯母片標題樣式</a:t>
             </a:r>
-            <a:endParaRPr lang="zh-TW" altLang="en-US"/>
           </a:p>
         </p:txBody>
       </p:sp>
@@ -1213,38 +1203,37 @@
           <a:p>
             <a:pPr lvl="0"/>
             <a:r>
-              <a:rPr lang="zh-TW" altLang="en-US" smtClean="0"/>
+              <a:rPr lang="zh-TW" altLang="en-US"/>
               <a:t>按一下以編輯母片文字樣式</a:t>
             </a:r>
           </a:p>
           <a:p>
             <a:pPr lvl="1"/>
             <a:r>
-              <a:rPr lang="zh-TW" altLang="en-US" smtClean="0"/>
+              <a:rPr lang="zh-TW" altLang="en-US"/>
               <a:t>第二層</a:t>
             </a:r>
           </a:p>
           <a:p>
             <a:pPr lvl="2"/>
             <a:r>
-              <a:rPr lang="zh-TW" altLang="en-US" smtClean="0"/>
+              <a:rPr lang="zh-TW" altLang="en-US"/>
               <a:t>第三層</a:t>
             </a:r>
           </a:p>
           <a:p>
             <a:pPr lvl="3"/>
             <a:r>
-              <a:rPr lang="zh-TW" altLang="en-US" smtClean="0"/>
+              <a:rPr lang="zh-TW" altLang="en-US"/>
               <a:t>第四層</a:t>
             </a:r>
           </a:p>
           <a:p>
             <a:pPr lvl="4"/>
             <a:r>
-              <a:rPr lang="zh-TW" altLang="en-US" smtClean="0"/>
+              <a:rPr lang="zh-TW" altLang="en-US"/>
               <a:t>第五層</a:t>
             </a:r>
-            <a:endParaRPr lang="zh-TW" altLang="en-US"/>
           </a:p>
         </p:txBody>
       </p:sp>
@@ -1298,38 +1287,37 @@
           <a:p>
             <a:pPr lvl="0"/>
             <a:r>
-              <a:rPr lang="zh-TW" altLang="en-US" smtClean="0"/>
+              <a:rPr lang="zh-TW" altLang="en-US"/>
               <a:t>按一下以編輯母片文字樣式</a:t>
             </a:r>
           </a:p>
           <a:p>
             <a:pPr lvl="1"/>
             <a:r>
-              <a:rPr lang="zh-TW" altLang="en-US" smtClean="0"/>
+              <a:rPr lang="zh-TW" altLang="en-US"/>
               <a:t>第二層</a:t>
             </a:r>
           </a:p>
           <a:p>
             <a:pPr lvl="2"/>
             <a:r>
-              <a:rPr lang="zh-TW" altLang="en-US" smtClean="0"/>
+              <a:rPr lang="zh-TW" altLang="en-US"/>
               <a:t>第三層</a:t>
             </a:r>
           </a:p>
           <a:p>
             <a:pPr lvl="3"/>
             <a:r>
-              <a:rPr lang="zh-TW" altLang="en-US" smtClean="0"/>
+              <a:rPr lang="zh-TW" altLang="en-US"/>
               <a:t>第四層</a:t>
             </a:r>
           </a:p>
           <a:p>
             <a:pPr lvl="4"/>
             <a:r>
-              <a:rPr lang="zh-TW" altLang="en-US" smtClean="0"/>
+              <a:rPr lang="zh-TW" altLang="en-US"/>
               <a:t>第五層</a:t>
             </a:r>
-            <a:endParaRPr lang="zh-TW" altLang="en-US"/>
           </a:p>
         </p:txBody>
       </p:sp>
@@ -1350,7 +1338,7 @@
           <a:p>
             <a:fld id="{F64B101B-5B87-4A49-B942-DEC712B6B7B9}" type="datetimeFigureOut">
               <a:rPr lang="zh-TW" altLang="en-US" smtClean="0"/>
-              <a:t>2023/11/18</a:t>
+              <a:t>2024/5/25</a:t>
             </a:fld>
             <a:endParaRPr lang="zh-TW" altLang="en-US"/>
           </a:p>
@@ -1443,10 +1431,9 @@
           </a:lstStyle>
           <a:p>
             <a:r>
-              <a:rPr lang="zh-TW" altLang="en-US" smtClean="0"/>
+              <a:rPr lang="zh-TW" altLang="en-US"/>
               <a:t>按一下以編輯母片標題樣式</a:t>
             </a:r>
-            <a:endParaRPr lang="zh-TW" altLang="en-US"/>
           </a:p>
         </p:txBody>
       </p:sp>
@@ -1509,7 +1496,7 @@
           <a:p>
             <a:pPr lvl="0"/>
             <a:r>
-              <a:rPr lang="zh-TW" altLang="en-US" smtClean="0"/>
+              <a:rPr lang="zh-TW" altLang="en-US"/>
               <a:t>按一下以編輯母片文字樣式</a:t>
             </a:r>
           </a:p>
@@ -1565,38 +1552,37 @@
           <a:p>
             <a:pPr lvl="0"/>
             <a:r>
-              <a:rPr lang="zh-TW" altLang="en-US" smtClean="0"/>
+              <a:rPr lang="zh-TW" altLang="en-US"/>
               <a:t>按一下以編輯母片文字樣式</a:t>
             </a:r>
           </a:p>
           <a:p>
             <a:pPr lvl="1"/>
             <a:r>
-              <a:rPr lang="zh-TW" altLang="en-US" smtClean="0"/>
+              <a:rPr lang="zh-TW" altLang="en-US"/>
               <a:t>第二層</a:t>
             </a:r>
           </a:p>
           <a:p>
             <a:pPr lvl="2"/>
             <a:r>
-              <a:rPr lang="zh-TW" altLang="en-US" smtClean="0"/>
+              <a:rPr lang="zh-TW" altLang="en-US"/>
               <a:t>第三層</a:t>
             </a:r>
           </a:p>
           <a:p>
             <a:pPr lvl="3"/>
             <a:r>
-              <a:rPr lang="zh-TW" altLang="en-US" smtClean="0"/>
+              <a:rPr lang="zh-TW" altLang="en-US"/>
               <a:t>第四層</a:t>
             </a:r>
           </a:p>
           <a:p>
             <a:pPr lvl="4"/>
             <a:r>
-              <a:rPr lang="zh-TW" altLang="en-US" smtClean="0"/>
+              <a:rPr lang="zh-TW" altLang="en-US"/>
               <a:t>第五層</a:t>
             </a:r>
-            <a:endParaRPr lang="zh-TW" altLang="en-US"/>
           </a:p>
         </p:txBody>
       </p:sp>
@@ -1659,7 +1645,7 @@
           <a:p>
             <a:pPr lvl="0"/>
             <a:r>
-              <a:rPr lang="zh-TW" altLang="en-US" smtClean="0"/>
+              <a:rPr lang="zh-TW" altLang="en-US"/>
               <a:t>按一下以編輯母片文字樣式</a:t>
             </a:r>
           </a:p>
@@ -1715,38 +1701,37 @@
           <a:p>
             <a:pPr lvl="0"/>
             <a:r>
-              <a:rPr lang="zh-TW" altLang="en-US" smtClean="0"/>
+              <a:rPr lang="zh-TW" altLang="en-US"/>
               <a:t>按一下以編輯母片文字樣式</a:t>
             </a:r>
           </a:p>
           <a:p>
             <a:pPr lvl="1"/>
             <a:r>
-              <a:rPr lang="zh-TW" altLang="en-US" smtClean="0"/>
+              <a:rPr lang="zh-TW" altLang="en-US"/>
               <a:t>第二層</a:t>
             </a:r>
           </a:p>
           <a:p>
             <a:pPr lvl="2"/>
             <a:r>
-              <a:rPr lang="zh-TW" altLang="en-US" smtClean="0"/>
+              <a:rPr lang="zh-TW" altLang="en-US"/>
               <a:t>第三層</a:t>
             </a:r>
           </a:p>
           <a:p>
             <a:pPr lvl="3"/>
             <a:r>
-              <a:rPr lang="zh-TW" altLang="en-US" smtClean="0"/>
+              <a:rPr lang="zh-TW" altLang="en-US"/>
               <a:t>第四層</a:t>
             </a:r>
           </a:p>
           <a:p>
             <a:pPr lvl="4"/>
             <a:r>
-              <a:rPr lang="zh-TW" altLang="en-US" smtClean="0"/>
+              <a:rPr lang="zh-TW" altLang="en-US"/>
               <a:t>第五層</a:t>
             </a:r>
-            <a:endParaRPr lang="zh-TW" altLang="en-US"/>
           </a:p>
         </p:txBody>
       </p:sp>
@@ -1767,7 +1752,7 @@
           <a:p>
             <a:fld id="{F64B101B-5B87-4A49-B942-DEC712B6B7B9}" type="datetimeFigureOut">
               <a:rPr lang="zh-TW" altLang="en-US" smtClean="0"/>
-              <a:t>2023/11/18</a:t>
+              <a:t>2024/5/25</a:t>
             </a:fld>
             <a:endParaRPr lang="zh-TW" altLang="en-US"/>
           </a:p>
@@ -1856,10 +1841,9 @@
           <a:lstStyle/>
           <a:p>
             <a:r>
-              <a:rPr lang="zh-TW" altLang="en-US" smtClean="0"/>
+              <a:rPr lang="zh-TW" altLang="en-US"/>
               <a:t>按一下以編輯母片標題樣式</a:t>
             </a:r>
-            <a:endParaRPr lang="zh-TW" altLang="en-US"/>
           </a:p>
         </p:txBody>
       </p:sp>
@@ -1880,7 +1864,7 @@
           <a:p>
             <a:fld id="{F64B101B-5B87-4A49-B942-DEC712B6B7B9}" type="datetimeFigureOut">
               <a:rPr lang="zh-TW" altLang="en-US" smtClean="0"/>
-              <a:t>2023/11/18</a:t>
+              <a:t>2024/5/25</a:t>
             </a:fld>
             <a:endParaRPr lang="zh-TW" altLang="en-US"/>
           </a:p>
@@ -1970,7 +1954,7 @@
           <a:p>
             <a:fld id="{F64B101B-5B87-4A49-B942-DEC712B6B7B9}" type="datetimeFigureOut">
               <a:rPr lang="zh-TW" altLang="en-US" smtClean="0"/>
-              <a:t>2023/11/18</a:t>
+              <a:t>2024/5/25</a:t>
             </a:fld>
             <a:endParaRPr lang="zh-TW" altLang="en-US"/>
           </a:p>
@@ -2068,10 +2052,9 @@
           </a:lstStyle>
           <a:p>
             <a:r>
-              <a:rPr lang="zh-TW" altLang="en-US" smtClean="0"/>
+              <a:rPr lang="zh-TW" altLang="en-US"/>
               <a:t>按一下以編輯母片標題樣式</a:t>
             </a:r>
-            <a:endParaRPr lang="zh-TW" altLang="en-US"/>
           </a:p>
         </p:txBody>
       </p:sp>
@@ -2125,38 +2108,37 @@
           <a:p>
             <a:pPr lvl="0"/>
             <a:r>
-              <a:rPr lang="zh-TW" altLang="en-US" smtClean="0"/>
+              <a:rPr lang="zh-TW" altLang="en-US"/>
               <a:t>按一下以編輯母片文字樣式</a:t>
             </a:r>
           </a:p>
           <a:p>
             <a:pPr lvl="1"/>
             <a:r>
-              <a:rPr lang="zh-TW" altLang="en-US" smtClean="0"/>
+              <a:rPr lang="zh-TW" altLang="en-US"/>
               <a:t>第二層</a:t>
             </a:r>
           </a:p>
           <a:p>
             <a:pPr lvl="2"/>
             <a:r>
-              <a:rPr lang="zh-TW" altLang="en-US" smtClean="0"/>
+              <a:rPr lang="zh-TW" altLang="en-US"/>
               <a:t>第三層</a:t>
             </a:r>
           </a:p>
           <a:p>
             <a:pPr lvl="3"/>
             <a:r>
-              <a:rPr lang="zh-TW" altLang="en-US" smtClean="0"/>
+              <a:rPr lang="zh-TW" altLang="en-US"/>
               <a:t>第四層</a:t>
             </a:r>
           </a:p>
           <a:p>
             <a:pPr lvl="4"/>
             <a:r>
-              <a:rPr lang="zh-TW" altLang="en-US" smtClean="0"/>
+              <a:rPr lang="zh-TW" altLang="en-US"/>
               <a:t>第五層</a:t>
             </a:r>
-            <a:endParaRPr lang="zh-TW" altLang="en-US"/>
           </a:p>
         </p:txBody>
       </p:sp>
@@ -2219,7 +2201,7 @@
           <a:p>
             <a:pPr lvl="0"/>
             <a:r>
-              <a:rPr lang="zh-TW" altLang="en-US" smtClean="0"/>
+              <a:rPr lang="zh-TW" altLang="en-US"/>
               <a:t>按一下以編輯母片文字樣式</a:t>
             </a:r>
           </a:p>
@@ -2242,7 +2224,7 @@
           <a:p>
             <a:fld id="{F64B101B-5B87-4A49-B942-DEC712B6B7B9}" type="datetimeFigureOut">
               <a:rPr lang="zh-TW" altLang="en-US" smtClean="0"/>
-              <a:t>2023/11/18</a:t>
+              <a:t>2024/5/25</a:t>
             </a:fld>
             <a:endParaRPr lang="zh-TW" altLang="en-US"/>
           </a:p>
@@ -2340,10 +2322,9 @@
           </a:lstStyle>
           <a:p>
             <a:r>
-              <a:rPr lang="zh-TW" altLang="en-US" smtClean="0"/>
+              <a:rPr lang="zh-TW" altLang="en-US"/>
               <a:t>按一下以編輯母片標題樣式</a:t>
             </a:r>
-            <a:endParaRPr lang="zh-TW" altLang="en-US"/>
           </a:p>
         </p:txBody>
       </p:sp>
@@ -2405,10 +2386,9 @@
           </a:lstStyle>
           <a:p>
             <a:r>
-              <a:rPr lang="zh-TW" altLang="en-US" smtClean="0"/>
+              <a:rPr lang="zh-TW" altLang="en-US"/>
               <a:t>按一下圖示以新增圖片</a:t>
             </a:r>
-            <a:endParaRPr lang="zh-TW" altLang="en-US"/>
           </a:p>
         </p:txBody>
       </p:sp>
@@ -2471,7 +2451,7 @@
           <a:p>
             <a:pPr lvl="0"/>
             <a:r>
-              <a:rPr lang="zh-TW" altLang="en-US" smtClean="0"/>
+              <a:rPr lang="zh-TW" altLang="en-US"/>
               <a:t>按一下以編輯母片文字樣式</a:t>
             </a:r>
           </a:p>
@@ -2494,7 +2474,7 @@
           <a:p>
             <a:fld id="{F64B101B-5B87-4A49-B942-DEC712B6B7B9}" type="datetimeFigureOut">
               <a:rPr lang="zh-TW" altLang="en-US" smtClean="0"/>
-              <a:t>2023/11/18</a:t>
+              <a:t>2024/5/25</a:t>
             </a:fld>
             <a:endParaRPr lang="zh-TW" altLang="en-US"/>
           </a:p>
@@ -2603,10 +2583,9 @@
           <a:lstStyle/>
           <a:p>
             <a:r>
-              <a:rPr lang="zh-TW" altLang="en-US" smtClean="0"/>
+              <a:rPr lang="zh-TW" altLang="en-US"/>
               <a:t>按一下以編輯母片標題樣式</a:t>
             </a:r>
-            <a:endParaRPr lang="zh-TW" altLang="en-US"/>
           </a:p>
         </p:txBody>
       </p:sp>
@@ -2637,38 +2616,37 @@
           <a:p>
             <a:pPr lvl="0"/>
             <a:r>
-              <a:rPr lang="zh-TW" altLang="en-US" smtClean="0"/>
+              <a:rPr lang="zh-TW" altLang="en-US"/>
               <a:t>按一下以編輯母片文字樣式</a:t>
             </a:r>
           </a:p>
           <a:p>
             <a:pPr lvl="1"/>
             <a:r>
-              <a:rPr lang="zh-TW" altLang="en-US" smtClean="0"/>
+              <a:rPr lang="zh-TW" altLang="en-US"/>
               <a:t>第二層</a:t>
             </a:r>
           </a:p>
           <a:p>
             <a:pPr lvl="2"/>
             <a:r>
-              <a:rPr lang="zh-TW" altLang="en-US" smtClean="0"/>
+              <a:rPr lang="zh-TW" altLang="en-US"/>
               <a:t>第三層</a:t>
             </a:r>
           </a:p>
           <a:p>
             <a:pPr lvl="3"/>
             <a:r>
-              <a:rPr lang="zh-TW" altLang="en-US" smtClean="0"/>
+              <a:rPr lang="zh-TW" altLang="en-US"/>
               <a:t>第四層</a:t>
             </a:r>
           </a:p>
           <a:p>
             <a:pPr lvl="4"/>
             <a:r>
-              <a:rPr lang="zh-TW" altLang="en-US" smtClean="0"/>
+              <a:rPr lang="zh-TW" altLang="en-US"/>
               <a:t>第五層</a:t>
             </a:r>
-            <a:endParaRPr lang="zh-TW" altLang="en-US"/>
           </a:p>
         </p:txBody>
       </p:sp>
@@ -2707,7 +2685,7 @@
           <a:p>
             <a:fld id="{F64B101B-5B87-4A49-B942-DEC712B6B7B9}" type="datetimeFigureOut">
               <a:rPr lang="zh-TW" altLang="en-US" smtClean="0"/>
-              <a:t>2023/11/18</a:t>
+              <a:t>2024/5/25</a:t>
             </a:fld>
             <a:endParaRPr lang="zh-TW" altLang="en-US"/>
           </a:p>
@@ -3114,24 +3092,7 @@
                 <a:latin typeface="微軟正黑體" pitchFamily="34" charset="-120"/>
                 <a:ea typeface="微軟正黑體" pitchFamily="34" charset="-120"/>
               </a:rPr>
-              <a:t>我</a:t>
-            </a:r>
-            <a:r>
-              <a:rPr lang="zh-TW" altLang="en-US" sz="7200" b="1" i="1" dirty="0">
-                <a:solidFill>
-                  <a:srgbClr val="000066"/>
-                </a:solidFill>
-                <a:effectLst>
-                  <a:outerShdw blurRad="38100" dist="38100" dir="2700000" algn="tl">
-                    <a:srgbClr val="000000">
-                      <a:alpha val="43137"/>
-                    </a:srgbClr>
-                  </a:outerShdw>
-                </a:effectLst>
-                <a:latin typeface="微軟正黑體" pitchFamily="34" charset="-120"/>
-                <a:ea typeface="微軟正黑體" pitchFamily="34" charset="-120"/>
-              </a:rPr>
-              <a:t>們獻上</a:t>
+              <a:t>我們獻上</a:t>
             </a:r>
           </a:p>
         </p:txBody>
@@ -3382,13 +3343,6 @@
               </a:rPr>
               <a:t>祢的慈愛  直到永遠</a:t>
             </a:r>
-            <a:endParaRPr lang="zh-TW" altLang="en-US" sz="6400" b="1" dirty="0">
-              <a:solidFill>
-                <a:srgbClr val="000066"/>
-              </a:solidFill>
-              <a:latin typeface="微軟正黑體" pitchFamily="34" charset="-120"/>
-              <a:ea typeface="微軟正黑體" pitchFamily="34" charset="-120"/>
-            </a:endParaRPr>
           </a:p>
         </p:txBody>
       </p:sp>
@@ -3700,13 +3654,6 @@
               </a:rPr>
               <a:t>歡迎祢的國度降臨</a:t>
             </a:r>
-            <a:endParaRPr lang="zh-TW" altLang="en-US" sz="6400" b="1" dirty="0">
-              <a:solidFill>
-                <a:srgbClr val="000066"/>
-              </a:solidFill>
-              <a:latin typeface="微軟正黑體" pitchFamily="34" charset="-120"/>
-              <a:ea typeface="微軟正黑體" pitchFamily="34" charset="-120"/>
-            </a:endParaRPr>
           </a:p>
         </p:txBody>
       </p:sp>
@@ -3859,13 +3806,6 @@
               </a:rPr>
               <a:t>哈利路亞  榮耀都歸於祢</a:t>
             </a:r>
-            <a:endParaRPr lang="zh-TW" altLang="en-US" sz="6400" b="1" dirty="0">
-              <a:solidFill>
-                <a:srgbClr val="000066"/>
-              </a:solidFill>
-              <a:latin typeface="微軟正黑體" pitchFamily="34" charset="-120"/>
-              <a:ea typeface="微軟正黑體" pitchFamily="34" charset="-120"/>
-            </a:endParaRPr>
           </a:p>
         </p:txBody>
       </p:sp>
@@ -3921,6 +3861,36 @@
                 <a:ea typeface="Microsoft JhengHei" panose="020B0604030504040204" pitchFamily="34" charset="-120"/>
               </a:rPr>
               <a:t> )</a:t>
+            </a:r>
+            <a:r>
+              <a:rPr lang="zh-CN" altLang="en-US" sz="3733" b="1" dirty="0">
+                <a:solidFill>
+                  <a:srgbClr val="000066"/>
+                </a:solidFill>
+                <a:latin typeface="Microsoft JhengHei" panose="020B0604030504040204" pitchFamily="34" charset="-120"/>
+                <a:ea typeface="Microsoft JhengHei" panose="020B0604030504040204" pitchFamily="34" charset="-120"/>
+              </a:rPr>
+              <a:t>（</a:t>
+            </a:r>
+            <a:r>
+              <a:rPr lang="en-US" altLang="zh-CN" sz="3733" b="1" dirty="0">
+                <a:solidFill>
+                  <a:srgbClr val="000066"/>
+                </a:solidFill>
+                <a:latin typeface="Microsoft JhengHei" panose="020B0604030504040204" pitchFamily="34" charset="-120"/>
+                <a:ea typeface="Microsoft JhengHei" panose="020B0604030504040204" pitchFamily="34" charset="-120"/>
+              </a:rPr>
+              <a:t>2</a:t>
+            </a:r>
+            <a:r>
+              <a:rPr lang="zh-CN" altLang="en-US" sz="3733" b="1">
+                <a:solidFill>
+                  <a:srgbClr val="000066"/>
+                </a:solidFill>
+                <a:latin typeface="Microsoft JhengHei" panose="020B0604030504040204" pitchFamily="34" charset="-120"/>
+                <a:ea typeface="Microsoft JhengHei" panose="020B0604030504040204" pitchFamily="34" charset="-120"/>
+              </a:rPr>
+              <a:t>次）</a:t>
             </a:r>
             <a:endParaRPr lang="vi-VN" sz="3733" b="1" dirty="0">
               <a:solidFill>
@@ -4177,13 +4147,6 @@
               </a:rPr>
               <a:t>祢的慈愛  直到永遠</a:t>
             </a:r>
-            <a:endParaRPr lang="zh-TW" altLang="en-US" sz="6400" b="1" dirty="0">
-              <a:solidFill>
-                <a:srgbClr val="000066"/>
-              </a:solidFill>
-              <a:latin typeface="微軟正黑體" pitchFamily="34" charset="-120"/>
-              <a:ea typeface="微軟正黑體" pitchFamily="34" charset="-120"/>
-            </a:endParaRPr>
           </a:p>
         </p:txBody>
       </p:sp>
@@ -4495,13 +4458,6 @@
               </a:rPr>
               <a:t>歡迎祢的國度  降臨這土地</a:t>
             </a:r>
-            <a:endParaRPr lang="zh-TW" altLang="en-US" sz="6400" b="1" dirty="0">
-              <a:solidFill>
-                <a:srgbClr val="000066"/>
-              </a:solidFill>
-              <a:latin typeface="微軟正黑體" pitchFamily="34" charset="-120"/>
-              <a:ea typeface="微軟正黑體" pitchFamily="34" charset="-120"/>
-            </a:endParaRPr>
           </a:p>
         </p:txBody>
       </p:sp>
@@ -4813,13 +4769,6 @@
               </a:rPr>
               <a:t>我們前來  向主歌唱</a:t>
             </a:r>
-            <a:endParaRPr lang="zh-TW" altLang="en-US" sz="6400" b="1" dirty="0">
-              <a:solidFill>
-                <a:srgbClr val="000066"/>
-              </a:solidFill>
-              <a:latin typeface="微軟正黑體" pitchFamily="34" charset="-120"/>
-              <a:ea typeface="微軟正黑體" pitchFamily="34" charset="-120"/>
-            </a:endParaRPr>
           </a:p>
         </p:txBody>
       </p:sp>
@@ -5131,13 +5080,6 @@
               </a:rPr>
               <a:t>祢的慈愛  直到永遠</a:t>
             </a:r>
-            <a:endParaRPr lang="zh-TW" altLang="en-US" sz="6400" b="1" dirty="0">
-              <a:solidFill>
-                <a:srgbClr val="000066"/>
-              </a:solidFill>
-              <a:latin typeface="微軟正黑體" pitchFamily="34" charset="-120"/>
-              <a:ea typeface="微軟正黑體" pitchFamily="34" charset="-120"/>
-            </a:endParaRPr>
           </a:p>
         </p:txBody>
       </p:sp>
@@ -5449,13 +5391,6 @@
               </a:rPr>
               <a:t>歡迎祢的國度  降臨這土地</a:t>
             </a:r>
-            <a:endParaRPr lang="zh-TW" altLang="en-US" sz="6400" b="1" dirty="0">
-              <a:solidFill>
-                <a:srgbClr val="000066"/>
-              </a:solidFill>
-              <a:latin typeface="微軟正黑體" pitchFamily="34" charset="-120"/>
-              <a:ea typeface="微軟正黑體" pitchFamily="34" charset="-120"/>
-            </a:endParaRPr>
           </a:p>
         </p:txBody>
       </p:sp>
@@ -5827,13 +5762,6 @@
               </a:rPr>
               <a:t>為要訴說  祢的愛</a:t>
             </a:r>
-            <a:endParaRPr lang="zh-TW" altLang="en-US" sz="6400" b="1" dirty="0">
-              <a:solidFill>
-                <a:srgbClr val="000066"/>
-              </a:solidFill>
-              <a:latin typeface="微軟正黑體" pitchFamily="34" charset="-120"/>
-              <a:ea typeface="微軟正黑體" pitchFamily="34" charset="-120"/>
-            </a:endParaRPr>
           </a:p>
         </p:txBody>
       </p:sp>
